--- a/assets/pptx/catalog-634.pptx
+++ b/assets/pptx/catalog-634.pptx
@@ -3241,7 +3241,7 @@
                 <a:ea typeface="Ebrima"/>
                 <a:cs typeface="Ebrima"/>
               </a:rPr>
-              <a:t>አይገልጽህም የእኔ ቃላት አይገልጽህም የእኔ አንደበት ዘውትር ለአንተ ልስገድልህ (ልስገድልህ)</a:t>
+              <a:t>አይገልጽህም የእኔ ቃላት አይገልጽህም የእኔ አንደበት ዘውትር ለአንተ ልስገድልህ ልስገድልህ</a:t>
             </a:r>
           </a:p>
           <a:p>
@@ -3259,7 +3259,7 @@
                 <a:ea typeface="Ebrima"/>
                 <a:cs typeface="Ebrima"/>
               </a:rPr>
-              <a:t>ልቀኝልህ ልሁን በፊትህ (ልሁን በፊትህ)</a:t>
+              <a:t>ልቀኝልህ ልሁን በፊትህ ልሁን በፊትህ</a:t>
             </a:r>
           </a:p>
           <a:p>
@@ -3277,7 +3277,7 @@
                 <a:ea typeface="Ebrima"/>
                 <a:cs typeface="Ebrima"/>
               </a:rPr>
-              <a:t>(2x)</a:t>
+              <a:t>2x</a:t>
             </a:r>
           </a:p>
           <a:p>
@@ -3295,7 +3295,7 @@
                 <a:ea typeface="Ebrima"/>
                 <a:cs typeface="Ebrima"/>
               </a:rPr>
-              <a:t>(አንተ) ስትሰራ የኖርክ ከጥንት ጀምሮ</a:t>
+              <a:t>አንተ ስትሰራ የኖርክ ከጥንት ጀምሮ</a:t>
             </a:r>
           </a:p>
           <a:p>
@@ -3313,7 +3313,7 @@
                 <a:ea typeface="Ebrima"/>
                 <a:cs typeface="Ebrima"/>
               </a:rPr>
-              <a:t>(አንተ) ሥራህ አዲስ ነው መቼ ተቆጥሮ</a:t>
+              <a:t>አንተ ሥራህ አዲስ ነው መቼ ተቆጥሮ</a:t>
             </a:r>
           </a:p>
           <a:p>
@@ -3331,7 +3331,7 @@
                 <a:ea typeface="Ebrima"/>
                 <a:cs typeface="Ebrima"/>
               </a:rPr>
-              <a:t>(አንተ) ሁሌ አዲስ ነህ አዲስ ነህ ለእኔ</a:t>
+              <a:t>አንተ ሁሌ አዲስ ነህ አዲስ ነህ ለእኔ</a:t>
             </a:r>
           </a:p>
           <a:p>
@@ -3349,7 +3349,7 @@
                 <a:ea typeface="Ebrima"/>
                 <a:cs typeface="Ebrima"/>
               </a:rPr>
-              <a:t>(አንተ) አትለመድም ጌታዬ በእኔ (2x)</a:t>
+              <a:t>አንተ አትለመድም ጌታዬ በእኔ 2x</a:t>
             </a:r>
           </a:p>
           <a:p>
@@ -3367,7 +3367,7 @@
                 <a:ea typeface="Ebrima"/>
                 <a:cs typeface="Ebrima"/>
               </a:rPr>
-              <a:t>አትለመድም ጌታዬ በእኔ (3x) አትለመድም አትለመድም ልዩ ለእኔ (2x)</a:t>
+              <a:t>አትለመድም ጌታዬ በእኔ 3x አትለመድም አትለመድም ልዩ ለእኔ 2x</a:t>
             </a:r>
           </a:p>
           <a:p>
@@ -3475,7 +3475,7 @@
                 <a:ea typeface="Ebrima"/>
                 <a:cs typeface="Ebrima"/>
               </a:rPr>
-              <a:t>አንተ ያው አንተ ነህ (አንተ) አንተ ያው አንተ ነህ (ያው አንተው ነህ) ኢየሱስ ያው አንተ ነህ (ያው አንተው ነህ) (2x)</a:t>
+              <a:t>አንተ ያው አንተ ነህ አንተ አንተ ያው አንተ ነህ ያው አንተው ነህ ኢየሱስ ያው አንተ ነህ ያው አንተው ነህ 2x</a:t>
             </a:r>
           </a:p>
           <a:p>
@@ -3493,7 +3493,7 @@
                 <a:ea typeface="Ebrima"/>
                 <a:cs typeface="Ebrima"/>
               </a:rPr>
-              <a:t>ጌታ ያው አንተ ነህ (ያው አንተው ነህ)</a:t>
+              <a:t>ጌታ ያው አንተ ነህ ያው አንተው ነህ</a:t>
             </a:r>
           </a:p>
           <a:p>
@@ -3511,7 +3511,7 @@
                 <a:ea typeface="Ebrima"/>
                 <a:cs typeface="Ebrima"/>
               </a:rPr>
-              <a:t>ኢየሱስ ያው አንተ ነህ (ያው አንተው ነህ)</a:t>
+              <a:t>ኢየሱስ ያው አንተ ነህ ያው አንተው ነህ</a:t>
             </a:r>
           </a:p>
           <a:p>
@@ -3529,7 +3529,7 @@
                 <a:ea typeface="Ebrima"/>
                 <a:cs typeface="Ebrima"/>
               </a:rPr>
-              <a:t>ጌታ ያው አንተ ነህ (ጌታ)</a:t>
+              <a:t>ጌታ ያው አንተ ነህ ጌታ</a:t>
             </a:r>
           </a:p>
           <a:p>
@@ -3547,7 +3547,7 @@
                 <a:ea typeface="Ebrima"/>
                 <a:cs typeface="Ebrima"/>
               </a:rPr>
-              <a:t>ኢየሱስ ያው አንተ ነህ (ያው አንተው ነህ)</a:t>
+              <a:t>ኢየሱስ ያው አንተ ነህ ያው አንተው ነህ</a:t>
             </a:r>
           </a:p>
           <a:p>
@@ -3565,7 +3565,7 @@
                 <a:ea typeface="Ebrima"/>
                 <a:cs typeface="Ebrima"/>
               </a:rPr>
-              <a:t>አይገልጽህም የእኔ ቃላት አይገልጽህም የእኔ አንደበት ዘውትር ለአንተ ልስገድልህ (ልስገድልህ)</a:t>
+              <a:t>አይገልጽህም የእኔ ቃላት አይገልጽህም የእኔ አንደበት ዘውትር ለአንተ ልስገድልህ ልስገድልህ</a:t>
             </a:r>
           </a:p>
           <a:p>
@@ -3583,7 +3583,7 @@
                 <a:ea typeface="Ebrima"/>
                 <a:cs typeface="Ebrima"/>
               </a:rPr>
-              <a:t>ልቀኝልህ ልሁን በፊትህ (ልሁን በፊትህ)</a:t>
+              <a:t>ልቀኝልህ ልሁን በፊትህ ልሁን በፊትህ</a:t>
             </a:r>
           </a:p>
           <a:p>
@@ -3601,7 +3601,7 @@
                 <a:ea typeface="Ebrima"/>
                 <a:cs typeface="Ebrima"/>
               </a:rPr>
-              <a:t>(2x)</a:t>
+              <a:t>2x</a:t>
             </a:r>
           </a:p>
           <a:p>
@@ -3619,7 +3619,7 @@
                 <a:ea typeface="Ebrima"/>
                 <a:cs typeface="Ebrima"/>
               </a:rPr>
-              <a:t>(አንተ) አንተን ያወቀ የተረዳህ</a:t>
+              <a:t>አንተ አንተን ያወቀ የተረዳህ</a:t>
             </a:r>
           </a:p>
           <a:p>
@@ -3637,7 +3637,7 @@
                 <a:ea typeface="Ebrima"/>
                 <a:cs typeface="Ebrima"/>
               </a:rPr>
-              <a:t>(አንተ) እንዴት ይችላል ሳያመልክህ</a:t>
+              <a:t>አንተ እንዴት ይችላል ሳያመልክህ</a:t>
             </a:r>
           </a:p>
           <a:p>
@@ -3655,7 +3655,7 @@
                 <a:ea typeface="Ebrima"/>
                 <a:cs typeface="Ebrima"/>
               </a:rPr>
-              <a:t>(አንተ) ፍቅር እኮ ነህ ፍቅር ነህ ጌታ</a:t>
+              <a:t>አንተ ፍቅር እኮ ነህ ፍቅር ነህ ጌታ</a:t>
             </a:r>
           </a:p>
           <a:p>
@@ -3673,7 +3673,7 @@
                 <a:ea typeface="Ebrima"/>
                 <a:cs typeface="Ebrima"/>
               </a:rPr>
-              <a:t>(አንተ) በምንም ነገር የማትተካ (2x)</a:t>
+              <a:t>አንተ በምንም ነገር የማትተካ 2x</a:t>
             </a:r>
           </a:p>
           <a:p>
@@ -3691,7 +3691,7 @@
                 <a:ea typeface="Ebrima"/>
                 <a:cs typeface="Ebrima"/>
               </a:rPr>
-              <a:t>አንተ ያው አንተ ነህ (አንተ) አንተ ያው አንተ ነህ (ያው አንተው ነህ) ኢየሱስ ያው አንተ ነህ (ያው አንተው ነህ) (2x)</a:t>
+              <a:t>አንተ ያው አንተ ነህ አንተ አንተ ያው አንተ ነህ ያው አንተው ነህ ኢየሱስ ያው አንተ ነህ ያው አንተው ነህ 2x</a:t>
             </a:r>
           </a:p>
           <a:p>
@@ -3709,7 +3709,7 @@
                 <a:ea typeface="Ebrima"/>
                 <a:cs typeface="Ebrima"/>
               </a:rPr>
-              <a:t>ጌታ ያው አንተ ነህ (ያው አንተው ነህ)</a:t>
+              <a:t>ጌታ ያው አንተ ነህ ያው አንተው ነህ</a:t>
             </a:r>
           </a:p>
           <a:p>
@@ -3727,7 +3727,7 @@
                 <a:ea typeface="Ebrima"/>
                 <a:cs typeface="Ebrima"/>
               </a:rPr>
-              <a:t>ኢየሱስ ያው አንተ ነህ (ያው አንተው ነህ)</a:t>
+              <a:t>ኢየሱስ ያው አንተ ነህ ያው አንተው ነህ</a:t>
             </a:r>
           </a:p>
           <a:p>
@@ -3745,7 +3745,7 @@
                 <a:ea typeface="Ebrima"/>
                 <a:cs typeface="Ebrima"/>
               </a:rPr>
-              <a:t>ጌታ ያው አንተ ነህ (ጌታ)</a:t>
+              <a:t>ጌታ ያው አንተ ነህ ጌታ</a:t>
             </a:r>
           </a:p>
           <a:p>
@@ -3763,7 +3763,7 @@
                 <a:ea typeface="Ebrima"/>
                 <a:cs typeface="Ebrima"/>
               </a:rPr>
-              <a:t>ኢየሱስ ያው አንተ ነህ (ያው አንተው ነህ)</a:t>
+              <a:t>ኢየሱስ ያው አንተ ነህ ያው አንተው ነህ</a:t>
             </a:r>
           </a:p>
         </p:txBody>
